--- a/ゲーム科1年/00_前期/ゲームプログラミングⅢ/ゲーム数学/座学/04_2点間の距離.pptx
+++ b/ゲーム科1年/00_前期/ゲームプログラミングⅢ/ゲーム数学/座学/04_2点間の距離.pptx
@@ -265,7 +265,7 @@
           <a:p>
             <a:fld id="{E9CC885B-4903-4D54-9A93-00025F12DED9}" type="datetimeFigureOut">
               <a:rPr kumimoji="1" lang="ja-JP" altLang="en-US" smtClean="0"/>
-              <a:t>2024/10/3</a:t>
+              <a:t>2025/6/12</a:t>
             </a:fld>
             <a:endParaRPr kumimoji="1" lang="ja-JP" altLang="en-US"/>
           </a:p>
@@ -495,7 +495,7 @@
           <a:p>
             <a:fld id="{E9CC885B-4903-4D54-9A93-00025F12DED9}" type="datetimeFigureOut">
               <a:rPr kumimoji="1" lang="ja-JP" altLang="en-US" smtClean="0"/>
-              <a:t>2024/10/3</a:t>
+              <a:t>2025/6/12</a:t>
             </a:fld>
             <a:endParaRPr kumimoji="1" lang="ja-JP" altLang="en-US"/>
           </a:p>
@@ -735,7 +735,7 @@
           <a:p>
             <a:fld id="{E9CC885B-4903-4D54-9A93-00025F12DED9}" type="datetimeFigureOut">
               <a:rPr kumimoji="1" lang="ja-JP" altLang="en-US" smtClean="0"/>
-              <a:t>2024/10/3</a:t>
+              <a:t>2025/6/12</a:t>
             </a:fld>
             <a:endParaRPr kumimoji="1" lang="ja-JP" altLang="en-US"/>
           </a:p>
@@ -965,7 +965,7 @@
           <a:p>
             <a:fld id="{E9CC885B-4903-4D54-9A93-00025F12DED9}" type="datetimeFigureOut">
               <a:rPr kumimoji="1" lang="ja-JP" altLang="en-US" smtClean="0"/>
-              <a:t>2024/10/3</a:t>
+              <a:t>2025/6/12</a:t>
             </a:fld>
             <a:endParaRPr kumimoji="1" lang="ja-JP" altLang="en-US"/>
           </a:p>
@@ -1240,7 +1240,7 @@
           <a:p>
             <a:fld id="{E9CC885B-4903-4D54-9A93-00025F12DED9}" type="datetimeFigureOut">
               <a:rPr kumimoji="1" lang="ja-JP" altLang="en-US" smtClean="0"/>
-              <a:t>2024/10/3</a:t>
+              <a:t>2025/6/12</a:t>
             </a:fld>
             <a:endParaRPr kumimoji="1" lang="ja-JP" altLang="en-US"/>
           </a:p>
@@ -1569,7 +1569,7 @@
           <a:p>
             <a:fld id="{E9CC885B-4903-4D54-9A93-00025F12DED9}" type="datetimeFigureOut">
               <a:rPr kumimoji="1" lang="ja-JP" altLang="en-US" smtClean="0"/>
-              <a:t>2024/10/3</a:t>
+              <a:t>2025/6/12</a:t>
             </a:fld>
             <a:endParaRPr kumimoji="1" lang="ja-JP" altLang="en-US"/>
           </a:p>
@@ -2045,7 +2045,7 @@
           <a:p>
             <a:fld id="{E9CC885B-4903-4D54-9A93-00025F12DED9}" type="datetimeFigureOut">
               <a:rPr kumimoji="1" lang="ja-JP" altLang="en-US" smtClean="0"/>
-              <a:t>2024/10/3</a:t>
+              <a:t>2025/6/12</a:t>
             </a:fld>
             <a:endParaRPr kumimoji="1" lang="ja-JP" altLang="en-US"/>
           </a:p>
@@ -2186,7 +2186,7 @@
           <a:p>
             <a:fld id="{E9CC885B-4903-4D54-9A93-00025F12DED9}" type="datetimeFigureOut">
               <a:rPr kumimoji="1" lang="ja-JP" altLang="en-US" smtClean="0"/>
-              <a:t>2024/10/3</a:t>
+              <a:t>2025/6/12</a:t>
             </a:fld>
             <a:endParaRPr kumimoji="1" lang="ja-JP" altLang="en-US"/>
           </a:p>
@@ -2299,7 +2299,7 @@
           <a:p>
             <a:fld id="{E9CC885B-4903-4D54-9A93-00025F12DED9}" type="datetimeFigureOut">
               <a:rPr kumimoji="1" lang="ja-JP" altLang="en-US" smtClean="0"/>
-              <a:t>2024/10/3</a:t>
+              <a:t>2025/6/12</a:t>
             </a:fld>
             <a:endParaRPr kumimoji="1" lang="ja-JP" altLang="en-US"/>
           </a:p>
@@ -2642,7 +2642,7 @@
           <a:p>
             <a:fld id="{E9CC885B-4903-4D54-9A93-00025F12DED9}" type="datetimeFigureOut">
               <a:rPr kumimoji="1" lang="ja-JP" altLang="en-US" smtClean="0"/>
-              <a:t>2024/10/3</a:t>
+              <a:t>2025/6/12</a:t>
             </a:fld>
             <a:endParaRPr kumimoji="1" lang="ja-JP" altLang="en-US"/>
           </a:p>
@@ -2930,7 +2930,7 @@
           <a:p>
             <a:fld id="{E9CC885B-4903-4D54-9A93-00025F12DED9}" type="datetimeFigureOut">
               <a:rPr kumimoji="1" lang="ja-JP" altLang="en-US" smtClean="0"/>
-              <a:t>2024/10/3</a:t>
+              <a:t>2025/6/12</a:t>
             </a:fld>
             <a:endParaRPr kumimoji="1" lang="ja-JP" altLang="en-US"/>
           </a:p>
@@ -3203,7 +3203,7 @@
           <a:p>
             <a:fld id="{E9CC885B-4903-4D54-9A93-00025F12DED9}" type="datetimeFigureOut">
               <a:rPr kumimoji="1" lang="ja-JP" altLang="en-US" smtClean="0"/>
-              <a:t>2024/10/3</a:t>
+              <a:t>2025/6/12</a:t>
             </a:fld>
             <a:endParaRPr kumimoji="1" lang="ja-JP" altLang="en-US"/>
           </a:p>
@@ -3622,6 +3622,60 @@
       </p:grpSpPr>
       <p:sp>
         <p:nvSpPr>
+          <p:cNvPr id="3" name="四角形: 角を丸くする 2">
+            <a:extLst>
+              <a:ext uri="{FF2B5EF4-FFF2-40B4-BE49-F238E27FC236}">
+                <a16:creationId xmlns:a16="http://schemas.microsoft.com/office/drawing/2014/main" id="{3D00A4C7-0BD9-4A08-ACE7-703534033EA6}"/>
+              </a:ext>
+            </a:extLst>
+          </p:cNvPr>
+          <p:cNvSpPr/>
+          <p:nvPr/>
+        </p:nvSpPr>
+        <p:spPr>
+          <a:xfrm>
+            <a:off x="341614" y="2058332"/>
+            <a:ext cx="10529586" cy="4147735"/>
+          </a:xfrm>
+          <a:prstGeom prst="roundRect">
+            <a:avLst/>
+          </a:prstGeom>
+          <a:solidFill>
+            <a:schemeClr val="bg1">
+              <a:lumMod val="85000"/>
+            </a:schemeClr>
+          </a:solidFill>
+          <a:ln>
+            <a:noFill/>
+          </a:ln>
+        </p:spPr>
+        <p:style>
+          <a:lnRef idx="2">
+            <a:schemeClr val="accent1">
+              <a:shade val="50000"/>
+            </a:schemeClr>
+          </a:lnRef>
+          <a:fillRef idx="1">
+            <a:schemeClr val="accent1"/>
+          </a:fillRef>
+          <a:effectRef idx="0">
+            <a:schemeClr val="accent1"/>
+          </a:effectRef>
+          <a:fontRef idx="minor">
+            <a:schemeClr val="lt1"/>
+          </a:fontRef>
+        </p:style>
+        <p:txBody>
+          <a:bodyPr rtlCol="0" anchor="ctr"/>
+          <a:lstStyle/>
+          <a:p>
+            <a:pPr algn="ctr"/>
+            <a:endParaRPr kumimoji="1" lang="ja-JP" altLang="en-US"/>
+          </a:p>
+        </p:txBody>
+      </p:sp>
+      <p:sp>
+        <p:nvSpPr>
           <p:cNvPr id="4" name="テキスト ボックス 3">
             <a:extLst>
               <a:ext uri="{FF2B5EF4-FFF2-40B4-BE49-F238E27FC236}">
@@ -3655,8 +3709,8 @@
           </a:p>
         </p:txBody>
       </p:sp>
-      <mc:AlternateContent xmlns:mc="http://schemas.openxmlformats.org/markup-compatibility/2006">
-        <mc:Choice xmlns:a14="http://schemas.microsoft.com/office/drawing/2010/main" Requires="a14">
+      <mc:AlternateContent xmlns:mc="http://schemas.openxmlformats.org/markup-compatibility/2006" xmlns:a14="http://schemas.microsoft.com/office/drawing/2010/main">
+        <mc:Choice Requires="a14">
           <p:sp>
             <p:nvSpPr>
               <p:cNvPr id="6" name="テキスト ボックス 5">
@@ -3841,11 +3895,9 @@
                 <a:endParaRPr kumimoji="1" lang="en-US" altLang="ja-JP" sz="2400" dirty="0"/>
               </a:p>
               <a:p>
-                <a:pPr/>
                 <a:endParaRPr kumimoji="1" lang="en-US" altLang="ja-JP" sz="2400" dirty="0"/>
               </a:p>
               <a:p>
-                <a:pPr/>
                 <a14:m>
                   <m:oMath xmlns:m="http://schemas.openxmlformats.org/officeDocument/2006/math">
                     <m:r>
@@ -3867,7 +3919,6 @@
                 <a:endParaRPr kumimoji="1" lang="en-US" altLang="ja-JP" sz="2400" dirty="0"/>
               </a:p>
               <a:p>
-                <a:pPr/>
                 <a14:m>
                   <m:oMath xmlns:m="http://schemas.openxmlformats.org/officeDocument/2006/math">
                     <m:r>
@@ -3889,7 +3940,6 @@
                 <a:endParaRPr kumimoji="1" lang="en-US" altLang="ja-JP" sz="2400" dirty="0"/>
               </a:p>
               <a:p>
-                <a:pPr/>
                 <a14:m>
                   <m:oMath xmlns:m="http://schemas.openxmlformats.org/officeDocument/2006/math">
                     <m:r>
@@ -3913,7 +3963,7 @@
             </p:txBody>
           </p:sp>
         </mc:Choice>
-        <mc:Fallback>
+        <mc:Fallback xmlns="">
           <p:sp>
             <p:nvSpPr>
               <p:cNvPr id="6" name="テキスト ボックス 5">
@@ -3979,6 +4029,11 @@
             <a:avLst/>
           </a:prstGeom>
           <a:noFill/>
+          <a:ln w="38100">
+            <a:solidFill>
+              <a:srgbClr val="FF0000"/>
+            </a:solidFill>
+          </a:ln>
         </p:spPr>
         <p:style>
           <a:lnRef idx="2">
@@ -4025,6 +4080,7 @@
           <a:prstGeom prst="line">
             <a:avLst/>
           </a:prstGeom>
+          <a:ln w="38100"/>
         </p:spPr>
         <p:style>
           <a:lnRef idx="1">
@@ -4063,6 +4119,7 @@
           <a:prstGeom prst="line">
             <a:avLst/>
           </a:prstGeom>
+          <a:ln w="38100"/>
         </p:spPr>
         <p:style>
           <a:lnRef idx="1">
@@ -4079,8 +4136,8 @@
           </a:fontRef>
         </p:style>
       </p:cxnSp>
-      <mc:AlternateContent xmlns:mc="http://schemas.openxmlformats.org/markup-compatibility/2006">
-        <mc:Choice xmlns:a14="http://schemas.microsoft.com/office/drawing/2010/main" Requires="a14">
+      <mc:AlternateContent xmlns:mc="http://schemas.openxmlformats.org/markup-compatibility/2006" xmlns:a14="http://schemas.microsoft.com/office/drawing/2010/main">
+        <mc:Choice Requires="a14">
           <p:sp>
             <p:nvSpPr>
               <p:cNvPr id="24" name="テキスト ボックス 23">
@@ -4130,7 +4187,7 @@
             </p:txBody>
           </p:sp>
         </mc:Choice>
-        <mc:Fallback>
+        <mc:Fallback xmlns="">
           <p:sp>
             <p:nvSpPr>
               <p:cNvPr id="24" name="テキスト ボックス 23">
@@ -4175,8 +4232,8 @@
           </p:sp>
         </mc:Fallback>
       </mc:AlternateContent>
-      <mc:AlternateContent xmlns:mc="http://schemas.openxmlformats.org/markup-compatibility/2006">
-        <mc:Choice xmlns:a14="http://schemas.microsoft.com/office/drawing/2010/main" Requires="a14">
+      <mc:AlternateContent xmlns:mc="http://schemas.openxmlformats.org/markup-compatibility/2006" xmlns:a14="http://schemas.microsoft.com/office/drawing/2010/main">
+        <mc:Choice Requires="a14">
           <p:sp>
             <p:nvSpPr>
               <p:cNvPr id="25" name="テキスト ボックス 24">
@@ -4226,7 +4283,7 @@
             </p:txBody>
           </p:sp>
         </mc:Choice>
-        <mc:Fallback>
+        <mc:Fallback xmlns="">
           <p:sp>
             <p:nvSpPr>
               <p:cNvPr id="25" name="テキスト ボックス 24">
@@ -4271,8 +4328,8 @@
           </p:sp>
         </mc:Fallback>
       </mc:AlternateContent>
-      <mc:AlternateContent xmlns:mc="http://schemas.openxmlformats.org/markup-compatibility/2006">
-        <mc:Choice xmlns:a14="http://schemas.microsoft.com/office/drawing/2010/main" Requires="a14">
+      <mc:AlternateContent xmlns:mc="http://schemas.openxmlformats.org/markup-compatibility/2006" xmlns:a14="http://schemas.microsoft.com/office/drawing/2010/main">
+        <mc:Choice Requires="a14">
           <p:sp>
             <p:nvSpPr>
               <p:cNvPr id="26" name="テキスト ボックス 25">
@@ -4322,7 +4379,7 @@
             </p:txBody>
           </p:sp>
         </mc:Choice>
-        <mc:Fallback>
+        <mc:Fallback xmlns="">
           <p:sp>
             <p:nvSpPr>
               <p:cNvPr id="26" name="テキスト ボックス 25">
@@ -4629,8 +4686,8 @@
           </p:style>
         </p:cxnSp>
       </p:grpSp>
-      <mc:AlternateContent xmlns:mc="http://schemas.openxmlformats.org/markup-compatibility/2006">
-        <mc:Choice xmlns:a14="http://schemas.microsoft.com/office/drawing/2010/main" Requires="a14">
+      <mc:AlternateContent xmlns:mc="http://schemas.openxmlformats.org/markup-compatibility/2006" xmlns:a14="http://schemas.microsoft.com/office/drawing/2010/main">
+        <mc:Choice Requires="a14">
           <p:sp>
             <p:nvSpPr>
               <p:cNvPr id="11" name="テキスト ボックス 10">
@@ -4659,6 +4716,7 @@
               </a:bodyPr>
               <a:lstStyle/>
               <a:p>
+                <a:pPr/>
                 <a14:m>
                   <m:oMathPara xmlns:m="http://schemas.openxmlformats.org/officeDocument/2006/math">
                     <m:oMathParaPr>
@@ -4703,7 +4761,7 @@
             </p:txBody>
           </p:sp>
         </mc:Choice>
-        <mc:Fallback>
+        <mc:Fallback xmlns="">
           <p:sp>
             <p:nvSpPr>
               <p:cNvPr id="11" name="テキスト ボックス 10">
@@ -4856,8 +4914,8 @@
           </a:p>
         </p:txBody>
       </p:sp>
-      <mc:AlternateContent xmlns:mc="http://schemas.openxmlformats.org/markup-compatibility/2006">
-        <mc:Choice xmlns:a14="http://schemas.microsoft.com/office/drawing/2010/main" Requires="a14">
+      <mc:AlternateContent xmlns:mc="http://schemas.openxmlformats.org/markup-compatibility/2006" xmlns:a14="http://schemas.microsoft.com/office/drawing/2010/main">
+        <mc:Choice Requires="a14">
           <p:sp>
             <p:nvSpPr>
               <p:cNvPr id="14" name="テキスト ボックス 13">
@@ -4886,6 +4944,7 @@
               </a:bodyPr>
               <a:lstStyle/>
               <a:p>
+                <a:pPr/>
                 <a14:m>
                   <m:oMathPara xmlns:m="http://schemas.openxmlformats.org/officeDocument/2006/math">
                     <m:oMathParaPr>
@@ -4930,7 +4989,7 @@
             </p:txBody>
           </p:sp>
         </mc:Choice>
-        <mc:Fallback>
+        <mc:Fallback xmlns="">
           <p:sp>
             <p:nvSpPr>
               <p:cNvPr id="14" name="テキスト ボックス 13">
@@ -4975,8 +5034,8 @@
           </p:sp>
         </mc:Fallback>
       </mc:AlternateContent>
-      <mc:AlternateContent xmlns:mc="http://schemas.openxmlformats.org/markup-compatibility/2006">
-        <mc:Choice xmlns:a14="http://schemas.microsoft.com/office/drawing/2010/main" Requires="a14">
+      <mc:AlternateContent xmlns:mc="http://schemas.openxmlformats.org/markup-compatibility/2006" xmlns:a14="http://schemas.microsoft.com/office/drawing/2010/main">
+        <mc:Choice Requires="a14">
           <p:sp>
             <p:nvSpPr>
               <p:cNvPr id="15" name="テキスト ボックス 14">
@@ -5026,7 +5085,7 @@
             </p:txBody>
           </p:sp>
         </mc:Choice>
-        <mc:Fallback>
+        <mc:Fallback xmlns="">
           <p:sp>
             <p:nvSpPr>
               <p:cNvPr id="15" name="テキスト ボックス 14">
@@ -5071,8 +5130,8 @@
           </p:sp>
         </mc:Fallback>
       </mc:AlternateContent>
-      <mc:AlternateContent xmlns:mc="http://schemas.openxmlformats.org/markup-compatibility/2006">
-        <mc:Choice xmlns:a14="http://schemas.microsoft.com/office/drawing/2010/main" Requires="a14">
+      <mc:AlternateContent xmlns:mc="http://schemas.openxmlformats.org/markup-compatibility/2006" xmlns:a14="http://schemas.microsoft.com/office/drawing/2010/main">
+        <mc:Choice Requires="a14">
           <p:sp>
             <p:nvSpPr>
               <p:cNvPr id="16" name="テキスト ボックス 15">
@@ -5122,7 +5181,7 @@
             </p:txBody>
           </p:sp>
         </mc:Choice>
-        <mc:Fallback>
+        <mc:Fallback xmlns="">
           <p:sp>
             <p:nvSpPr>
               <p:cNvPr id="16" name="テキスト ボックス 15">
@@ -5167,8 +5226,8 @@
           </p:sp>
         </mc:Fallback>
       </mc:AlternateContent>
-      <mc:AlternateContent xmlns:mc="http://schemas.openxmlformats.org/markup-compatibility/2006">
-        <mc:Choice xmlns:a14="http://schemas.microsoft.com/office/drawing/2010/main" Requires="a14">
+      <mc:AlternateContent xmlns:mc="http://schemas.openxmlformats.org/markup-compatibility/2006" xmlns:a14="http://schemas.microsoft.com/office/drawing/2010/main">
+        <mc:Choice Requires="a14">
           <p:sp>
             <p:nvSpPr>
               <p:cNvPr id="17" name="テキスト ボックス 16">
@@ -5218,7 +5277,7 @@
             </p:txBody>
           </p:sp>
         </mc:Choice>
-        <mc:Fallback>
+        <mc:Fallback xmlns="">
           <p:sp>
             <p:nvSpPr>
               <p:cNvPr id="17" name="テキスト ボックス 16">
@@ -5328,8 +5387,8 @@
           </a:p>
         </p:txBody>
       </p:sp>
-      <mc:AlternateContent xmlns:mc="http://schemas.openxmlformats.org/markup-compatibility/2006">
-        <mc:Choice xmlns:a14="http://schemas.microsoft.com/office/drawing/2010/main" Requires="a14">
+      <mc:AlternateContent xmlns:mc="http://schemas.openxmlformats.org/markup-compatibility/2006" xmlns:a14="http://schemas.microsoft.com/office/drawing/2010/main">
+        <mc:Choice Requires="a14">
           <p:sp>
             <p:nvSpPr>
               <p:cNvPr id="6" name="テキスト ボックス 5">
@@ -5434,7 +5493,7 @@
             </p:txBody>
           </p:sp>
         </mc:Choice>
-        <mc:Fallback>
+        <mc:Fallback xmlns="">
           <p:sp>
             <p:nvSpPr>
               <p:cNvPr id="6" name="テキスト ボックス 5">
@@ -5621,8 +5680,8 @@
           </p:style>
         </p:cxnSp>
       </p:grpSp>
-      <mc:AlternateContent xmlns:mc="http://schemas.openxmlformats.org/markup-compatibility/2006">
-        <mc:Choice xmlns:a14="http://schemas.microsoft.com/office/drawing/2010/main" Requires="a14">
+      <mc:AlternateContent xmlns:mc="http://schemas.openxmlformats.org/markup-compatibility/2006" xmlns:a14="http://schemas.microsoft.com/office/drawing/2010/main">
+        <mc:Choice Requires="a14">
           <p:sp>
             <p:nvSpPr>
               <p:cNvPr id="11" name="テキスト ボックス 10">
@@ -5651,6 +5710,7 @@
               </a:bodyPr>
               <a:lstStyle/>
               <a:p>
+                <a:pPr/>
                 <a14:m>
                   <m:oMathPara xmlns:m="http://schemas.openxmlformats.org/officeDocument/2006/math">
                     <m:oMathParaPr>
@@ -5733,7 +5793,7 @@
             </p:txBody>
           </p:sp>
         </mc:Choice>
-        <mc:Fallback>
+        <mc:Fallback xmlns="">
           <p:sp>
             <p:nvSpPr>
               <p:cNvPr id="11" name="テキスト ボックス 10">
@@ -5886,8 +5946,8 @@
           </a:p>
         </p:txBody>
       </p:sp>
-      <mc:AlternateContent xmlns:mc="http://schemas.openxmlformats.org/markup-compatibility/2006">
-        <mc:Choice xmlns:a14="http://schemas.microsoft.com/office/drawing/2010/main" Requires="a14">
+      <mc:AlternateContent xmlns:mc="http://schemas.openxmlformats.org/markup-compatibility/2006" xmlns:a14="http://schemas.microsoft.com/office/drawing/2010/main">
+        <mc:Choice Requires="a14">
           <p:sp>
             <p:nvSpPr>
               <p:cNvPr id="14" name="テキスト ボックス 13">
@@ -5916,6 +5976,7 @@
               </a:bodyPr>
               <a:lstStyle/>
               <a:p>
+                <a:pPr/>
                 <a14:m>
                   <m:oMathPara xmlns:m="http://schemas.openxmlformats.org/officeDocument/2006/math">
                     <m:oMathParaPr>
@@ -5998,7 +6059,7 @@
             </p:txBody>
           </p:sp>
         </mc:Choice>
-        <mc:Fallback>
+        <mc:Fallback xmlns="">
           <p:sp>
             <p:nvSpPr>
               <p:cNvPr id="14" name="テキスト ボックス 13">
@@ -6043,8 +6104,8 @@
           </p:sp>
         </mc:Fallback>
       </mc:AlternateContent>
-      <mc:AlternateContent xmlns:mc="http://schemas.openxmlformats.org/markup-compatibility/2006">
-        <mc:Choice xmlns:a14="http://schemas.microsoft.com/office/drawing/2010/main" Requires="a14">
+      <mc:AlternateContent xmlns:mc="http://schemas.openxmlformats.org/markup-compatibility/2006" xmlns:a14="http://schemas.microsoft.com/office/drawing/2010/main">
+        <mc:Choice Requires="a14">
           <p:sp>
             <p:nvSpPr>
               <p:cNvPr id="15" name="テキスト ボックス 14">
@@ -6156,7 +6217,7 @@
             </p:txBody>
           </p:sp>
         </mc:Choice>
-        <mc:Fallback>
+        <mc:Fallback xmlns="">
           <p:sp>
             <p:nvSpPr>
               <p:cNvPr id="15" name="テキスト ボックス 14">
@@ -6201,8 +6262,8 @@
           </p:sp>
         </mc:Fallback>
       </mc:AlternateContent>
-      <mc:AlternateContent xmlns:mc="http://schemas.openxmlformats.org/markup-compatibility/2006">
-        <mc:Choice xmlns:a14="http://schemas.microsoft.com/office/drawing/2010/main" Requires="a14">
+      <mc:AlternateContent xmlns:mc="http://schemas.openxmlformats.org/markup-compatibility/2006" xmlns:a14="http://schemas.microsoft.com/office/drawing/2010/main">
+        <mc:Choice Requires="a14">
           <p:sp>
             <p:nvSpPr>
               <p:cNvPr id="16" name="テキスト ボックス 15">
@@ -6314,7 +6375,7 @@
             </p:txBody>
           </p:sp>
         </mc:Choice>
-        <mc:Fallback>
+        <mc:Fallback xmlns="">
           <p:sp>
             <p:nvSpPr>
               <p:cNvPr id="16" name="テキスト ボックス 15">
@@ -6359,8 +6420,8 @@
           </p:sp>
         </mc:Fallback>
       </mc:AlternateContent>
-      <mc:AlternateContent xmlns:mc="http://schemas.openxmlformats.org/markup-compatibility/2006">
-        <mc:Choice xmlns:a14="http://schemas.microsoft.com/office/drawing/2010/main" Requires="a14">
+      <mc:AlternateContent xmlns:mc="http://schemas.openxmlformats.org/markup-compatibility/2006" xmlns:a14="http://schemas.microsoft.com/office/drawing/2010/main">
+        <mc:Choice Requires="a14">
           <p:sp>
             <p:nvSpPr>
               <p:cNvPr id="17" name="テキスト ボックス 16">
@@ -6422,7 +6483,7 @@
             </p:txBody>
           </p:sp>
         </mc:Choice>
-        <mc:Fallback>
+        <mc:Fallback xmlns="">
           <p:sp>
             <p:nvSpPr>
               <p:cNvPr id="17" name="テキスト ボックス 16">
@@ -6467,8 +6528,8 @@
           </p:sp>
         </mc:Fallback>
       </mc:AlternateContent>
-      <mc:AlternateContent xmlns:mc="http://schemas.openxmlformats.org/markup-compatibility/2006">
-        <mc:Choice xmlns:a14="http://schemas.microsoft.com/office/drawing/2010/main" Requires="a14">
+      <mc:AlternateContent xmlns:mc="http://schemas.openxmlformats.org/markup-compatibility/2006" xmlns:a14="http://schemas.microsoft.com/office/drawing/2010/main">
+        <mc:Choice Requires="a14">
           <p:sp>
             <p:nvSpPr>
               <p:cNvPr id="18" name="テキスト ボックス 17">
@@ -6914,7 +6975,6 @@
                 <a:endParaRPr kumimoji="1" lang="en-US" altLang="ja-JP" b="1" dirty="0"/>
               </a:p>
               <a:p>
-                <a:pPr/>
                 <a:r>
                   <a:rPr lang="ja-JP" altLang="en-US" dirty="0"/>
                   <a:t>となる。</a:t>
@@ -6924,7 +6984,7 @@
             </p:txBody>
           </p:sp>
         </mc:Choice>
-        <mc:Fallback>
+        <mc:Fallback xmlns="">
           <p:sp>
             <p:nvSpPr>
               <p:cNvPr id="18" name="テキスト ボックス 17">
@@ -6969,8 +7029,8 @@
           </p:sp>
         </mc:Fallback>
       </mc:AlternateContent>
-      <mc:AlternateContent xmlns:mc="http://schemas.openxmlformats.org/markup-compatibility/2006">
-        <mc:Choice xmlns:a14="http://schemas.microsoft.com/office/drawing/2010/main" Requires="a14">
+      <mc:AlternateContent xmlns:mc="http://schemas.openxmlformats.org/markup-compatibility/2006" xmlns:a14="http://schemas.microsoft.com/office/drawing/2010/main">
+        <mc:Choice Requires="a14">
           <p:sp>
             <p:nvSpPr>
               <p:cNvPr id="19" name="テキスト ボックス 18">
@@ -7111,7 +7171,6 @@
                 <a:endParaRPr kumimoji="1" lang="en-US" altLang="ja-JP" dirty="0"/>
               </a:p>
               <a:p>
-                <a:pPr/>
                 <a14:m>
                   <m:oMath xmlns:m="http://schemas.openxmlformats.org/officeDocument/2006/math">
                     <m:r>
@@ -7269,7 +7328,7 @@
             </p:txBody>
           </p:sp>
         </mc:Choice>
-        <mc:Fallback>
+        <mc:Fallback xmlns="">
           <p:sp>
             <p:nvSpPr>
               <p:cNvPr id="19" name="テキスト ボックス 18">
@@ -7346,6 +7405,60 @@
       </p:grpSpPr>
       <p:sp>
         <p:nvSpPr>
+          <p:cNvPr id="5" name="四角形: 角を丸くする 4">
+            <a:extLst>
+              <a:ext uri="{FF2B5EF4-FFF2-40B4-BE49-F238E27FC236}">
+                <a16:creationId xmlns:a16="http://schemas.microsoft.com/office/drawing/2014/main" id="{C7FE383B-49D2-4840-AA75-141E2333E4BB}"/>
+              </a:ext>
+            </a:extLst>
+          </p:cNvPr>
+          <p:cNvSpPr/>
+          <p:nvPr/>
+        </p:nvSpPr>
+        <p:spPr>
+          <a:xfrm>
+            <a:off x="341614" y="1871133"/>
+            <a:ext cx="7617053" cy="2648876"/>
+          </a:xfrm>
+          <a:prstGeom prst="roundRect">
+            <a:avLst/>
+          </a:prstGeom>
+          <a:solidFill>
+            <a:schemeClr val="bg1">
+              <a:lumMod val="85000"/>
+            </a:schemeClr>
+          </a:solidFill>
+          <a:ln>
+            <a:noFill/>
+          </a:ln>
+        </p:spPr>
+        <p:style>
+          <a:lnRef idx="2">
+            <a:schemeClr val="accent1">
+              <a:shade val="50000"/>
+            </a:schemeClr>
+          </a:lnRef>
+          <a:fillRef idx="1">
+            <a:schemeClr val="accent1"/>
+          </a:fillRef>
+          <a:effectRef idx="0">
+            <a:schemeClr val="accent1"/>
+          </a:effectRef>
+          <a:fontRef idx="minor">
+            <a:schemeClr val="lt1"/>
+          </a:fontRef>
+        </p:style>
+        <p:txBody>
+          <a:bodyPr rtlCol="0" anchor="ctr"/>
+          <a:lstStyle/>
+          <a:p>
+            <a:pPr algn="ctr"/>
+            <a:endParaRPr kumimoji="1" lang="ja-JP" altLang="en-US"/>
+          </a:p>
+        </p:txBody>
+      </p:sp>
+      <p:sp>
+        <p:nvSpPr>
           <p:cNvPr id="4" name="テキスト ボックス 3">
             <a:extLst>
               <a:ext uri="{FF2B5EF4-FFF2-40B4-BE49-F238E27FC236}">
@@ -7379,8 +7492,8 @@
           </a:p>
         </p:txBody>
       </p:sp>
-      <mc:AlternateContent xmlns:mc="http://schemas.openxmlformats.org/markup-compatibility/2006">
-        <mc:Choice xmlns:a14="http://schemas.microsoft.com/office/drawing/2010/main" Requires="a14">
+      <mc:AlternateContent xmlns:mc="http://schemas.openxmlformats.org/markup-compatibility/2006" xmlns:a14="http://schemas.microsoft.com/office/drawing/2010/main">
+        <mc:Choice Requires="a14">
           <p:sp>
             <p:nvSpPr>
               <p:cNvPr id="6" name="テキスト ボックス 5">
@@ -8007,11 +8120,9 @@
                 <a:endParaRPr kumimoji="1" lang="en-US" altLang="ja-JP" sz="2400" dirty="0"/>
               </a:p>
               <a:p>
-                <a:pPr/>
                 <a:endParaRPr lang="en-US" altLang="ja-JP" sz="2400" dirty="0"/>
               </a:p>
               <a:p>
-                <a:pPr/>
                 <a14:m>
                   <m:oMath xmlns:m="http://schemas.openxmlformats.org/officeDocument/2006/math">
                     <m:sSub>
@@ -8097,7 +8208,7 @@
             </p:txBody>
           </p:sp>
         </mc:Choice>
-        <mc:Fallback>
+        <mc:Fallback xmlns="">
           <p:sp>
             <p:nvSpPr>
               <p:cNvPr id="6" name="テキスト ボックス 5">
@@ -8207,8 +8318,8 @@
           </a:p>
         </p:txBody>
       </p:sp>
-      <mc:AlternateContent xmlns:mc="http://schemas.openxmlformats.org/markup-compatibility/2006">
-        <mc:Choice xmlns:a14="http://schemas.microsoft.com/office/drawing/2010/main" Requires="a14">
+      <mc:AlternateContent xmlns:mc="http://schemas.openxmlformats.org/markup-compatibility/2006" xmlns:a14="http://schemas.microsoft.com/office/drawing/2010/main">
+        <mc:Choice Requires="a14">
           <p:sp>
             <p:nvSpPr>
               <p:cNvPr id="6" name="テキスト ボックス 5">
@@ -9458,7 +9569,7 @@
             </p:txBody>
           </p:sp>
         </mc:Choice>
-        <mc:Fallback>
+        <mc:Fallback xmlns="">
           <p:sp>
             <p:nvSpPr>
               <p:cNvPr id="6" name="テキスト ボックス 5">
@@ -9535,6 +9646,60 @@
       </p:grpSpPr>
       <p:sp>
         <p:nvSpPr>
+          <p:cNvPr id="5" name="四角形: 角を丸くする 4">
+            <a:extLst>
+              <a:ext uri="{FF2B5EF4-FFF2-40B4-BE49-F238E27FC236}">
+                <a16:creationId xmlns:a16="http://schemas.microsoft.com/office/drawing/2014/main" id="{68E63127-75B0-421D-9802-87EFCFD8F79D}"/>
+              </a:ext>
+            </a:extLst>
+          </p:cNvPr>
+          <p:cNvSpPr/>
+          <p:nvPr/>
+        </p:nvSpPr>
+        <p:spPr>
+          <a:xfrm>
+            <a:off x="395227" y="1777999"/>
+            <a:ext cx="7617053" cy="2726267"/>
+          </a:xfrm>
+          <a:prstGeom prst="roundRect">
+            <a:avLst/>
+          </a:prstGeom>
+          <a:solidFill>
+            <a:schemeClr val="bg1">
+              <a:lumMod val="85000"/>
+            </a:schemeClr>
+          </a:solidFill>
+          <a:ln>
+            <a:noFill/>
+          </a:ln>
+        </p:spPr>
+        <p:style>
+          <a:lnRef idx="2">
+            <a:schemeClr val="accent1">
+              <a:shade val="50000"/>
+            </a:schemeClr>
+          </a:lnRef>
+          <a:fillRef idx="1">
+            <a:schemeClr val="accent1"/>
+          </a:fillRef>
+          <a:effectRef idx="0">
+            <a:schemeClr val="accent1"/>
+          </a:effectRef>
+          <a:fontRef idx="minor">
+            <a:schemeClr val="lt1"/>
+          </a:fontRef>
+        </p:style>
+        <p:txBody>
+          <a:bodyPr rtlCol="0" anchor="ctr"/>
+          <a:lstStyle/>
+          <a:p>
+            <a:pPr algn="ctr"/>
+            <a:endParaRPr kumimoji="1" lang="ja-JP" altLang="en-US"/>
+          </a:p>
+        </p:txBody>
+      </p:sp>
+      <p:sp>
+        <p:nvSpPr>
           <p:cNvPr id="4" name="テキスト ボックス 3">
             <a:extLst>
               <a:ext uri="{FF2B5EF4-FFF2-40B4-BE49-F238E27FC236}">
@@ -9568,8 +9733,8 @@
           </a:p>
         </p:txBody>
       </p:sp>
-      <mc:AlternateContent xmlns:mc="http://schemas.openxmlformats.org/markup-compatibility/2006">
-        <mc:Choice xmlns:a14="http://schemas.microsoft.com/office/drawing/2010/main" Requires="a14">
+      <mc:AlternateContent xmlns:mc="http://schemas.openxmlformats.org/markup-compatibility/2006" xmlns:a14="http://schemas.microsoft.com/office/drawing/2010/main">
+        <mc:Choice Requires="a14">
           <p:sp>
             <p:nvSpPr>
               <p:cNvPr id="6" name="テキスト ボックス 5">
@@ -10531,7 +10696,7 @@
             </p:txBody>
           </p:sp>
         </mc:Choice>
-        <mc:Fallback>
+        <mc:Fallback xmlns="">
           <p:sp>
             <p:nvSpPr>
               <p:cNvPr id="6" name="テキスト ボックス 5">
@@ -10641,8 +10806,8 @@
           </a:p>
         </p:txBody>
       </p:sp>
-      <mc:AlternateContent xmlns:mc="http://schemas.openxmlformats.org/markup-compatibility/2006">
-        <mc:Choice xmlns:a14="http://schemas.microsoft.com/office/drawing/2010/main" Requires="a14">
+      <mc:AlternateContent xmlns:mc="http://schemas.openxmlformats.org/markup-compatibility/2006" xmlns:a14="http://schemas.microsoft.com/office/drawing/2010/main">
+        <mc:Choice Requires="a14">
           <p:sp>
             <p:nvSpPr>
               <p:cNvPr id="6" name="テキスト ボックス 5">
@@ -10837,31 +11002,7 @@
                       <a:rPr lang="en-US" altLang="ja-JP" sz="2400" b="0" i="1" smtClean="0">
                         <a:latin typeface="Cambria Math" panose="02040503050406030204" pitchFamily="18" charset="0"/>
                       </a:rPr>
-                      <m:t>(</m:t>
-                    </m:r>
-                    <m:r>
-                      <a:rPr lang="en-US" altLang="ja-JP" sz="2400" b="0" i="1" smtClean="0">
-                        <a:latin typeface="Cambria Math" panose="02040503050406030204" pitchFamily="18" charset="0"/>
-                      </a:rPr>
-                      <m:t>20</m:t>
-                    </m:r>
-                    <m:r>
-                      <a:rPr lang="en-US" altLang="ja-JP" sz="2400" b="0" i="1" smtClean="0">
-                        <a:latin typeface="Cambria Math" panose="02040503050406030204" pitchFamily="18" charset="0"/>
-                      </a:rPr>
-                      <m:t>, </m:t>
-                    </m:r>
-                    <m:r>
-                      <a:rPr lang="en-US" altLang="ja-JP" sz="2400" b="0" i="1" smtClean="0">
-                        <a:latin typeface="Cambria Math" panose="02040503050406030204" pitchFamily="18" charset="0"/>
-                      </a:rPr>
-                      <m:t>50, −10</m:t>
-                    </m:r>
-                    <m:r>
-                      <a:rPr lang="en-US" altLang="ja-JP" sz="2400" b="0" i="1" smtClean="0">
-                        <a:latin typeface="Cambria Math" panose="02040503050406030204" pitchFamily="18" charset="0"/>
-                      </a:rPr>
-                      <m:t>)</m:t>
+                      <m:t>(20, 50, −10)</m:t>
                     </m:r>
                   </m:oMath>
                 </a14:m>
@@ -10933,7 +11074,7 @@
             </p:txBody>
           </p:sp>
         </mc:Choice>
-        <mc:Fallback>
+        <mc:Fallback xmlns="">
           <p:sp>
             <p:nvSpPr>
               <p:cNvPr id="6" name="テキスト ボックス 5">
